--- a/耶穌我恩主.pptx
+++ b/耶穌我恩主.pptx
@@ -312,7 +312,7 @@
           <a:p>
             <a:fld id="{BA3E7282-3862-45AD-8CA0-6240484C2ACC}" type="datetimeFigureOut">
               <a:rPr lang="zh-TW" altLang="en-US" smtClean="0"/>
-              <a:t>2023/12/22</a:t>
+              <a:t>2026/8/1</a:t>
             </a:fld>
             <a:endParaRPr lang="zh-TW" altLang="en-US"/>
           </a:p>
@@ -477,7 +477,7 @@
           <a:p>
             <a:fld id="{BA3E7282-3862-45AD-8CA0-6240484C2ACC}" type="datetimeFigureOut">
               <a:rPr lang="zh-TW" altLang="en-US" smtClean="0"/>
-              <a:t>2023/12/22</a:t>
+              <a:t>2026/8/1</a:t>
             </a:fld>
             <a:endParaRPr lang="zh-TW" altLang="en-US"/>
           </a:p>
@@ -652,7 +652,7 @@
           <a:p>
             <a:fld id="{BA3E7282-3862-45AD-8CA0-6240484C2ACC}" type="datetimeFigureOut">
               <a:rPr lang="zh-TW" altLang="en-US" smtClean="0"/>
-              <a:t>2023/12/22</a:t>
+              <a:t>2026/8/1</a:t>
             </a:fld>
             <a:endParaRPr lang="zh-TW" altLang="en-US"/>
           </a:p>
@@ -817,7 +817,7 @@
           <a:p>
             <a:fld id="{BA3E7282-3862-45AD-8CA0-6240484C2ACC}" type="datetimeFigureOut">
               <a:rPr lang="zh-TW" altLang="en-US" smtClean="0"/>
-              <a:t>2023/12/22</a:t>
+              <a:t>2026/8/1</a:t>
             </a:fld>
             <a:endParaRPr lang="zh-TW" altLang="en-US"/>
           </a:p>
@@ -1058,7 +1058,7 @@
           <a:p>
             <a:fld id="{BA3E7282-3862-45AD-8CA0-6240484C2ACC}" type="datetimeFigureOut">
               <a:rPr lang="zh-TW" altLang="en-US" smtClean="0"/>
-              <a:t>2023/12/22</a:t>
+              <a:t>2026/8/1</a:t>
             </a:fld>
             <a:endParaRPr lang="zh-TW" altLang="en-US"/>
           </a:p>
@@ -1341,7 +1341,7 @@
           <a:p>
             <a:fld id="{BA3E7282-3862-45AD-8CA0-6240484C2ACC}" type="datetimeFigureOut">
               <a:rPr lang="zh-TW" altLang="en-US" smtClean="0"/>
-              <a:t>2023/12/22</a:t>
+              <a:t>2026/8/1</a:t>
             </a:fld>
             <a:endParaRPr lang="zh-TW" altLang="en-US"/>
           </a:p>
@@ -1758,7 +1758,7 @@
           <a:p>
             <a:fld id="{BA3E7282-3862-45AD-8CA0-6240484C2ACC}" type="datetimeFigureOut">
               <a:rPr lang="zh-TW" altLang="en-US" smtClean="0"/>
-              <a:t>2023/12/22</a:t>
+              <a:t>2026/8/1</a:t>
             </a:fld>
             <a:endParaRPr lang="zh-TW" altLang="en-US"/>
           </a:p>
@@ -1871,7 +1871,7 @@
           <a:p>
             <a:fld id="{BA3E7282-3862-45AD-8CA0-6240484C2ACC}" type="datetimeFigureOut">
               <a:rPr lang="zh-TW" altLang="en-US" smtClean="0"/>
-              <a:t>2023/12/22</a:t>
+              <a:t>2026/8/1</a:t>
             </a:fld>
             <a:endParaRPr lang="zh-TW" altLang="en-US"/>
           </a:p>
@@ -1961,7 +1961,7 @@
           <a:p>
             <a:fld id="{BA3E7282-3862-45AD-8CA0-6240484C2ACC}" type="datetimeFigureOut">
               <a:rPr lang="zh-TW" altLang="en-US" smtClean="0"/>
-              <a:t>2023/12/22</a:t>
+              <a:t>2026/8/1</a:t>
             </a:fld>
             <a:endParaRPr lang="zh-TW" altLang="en-US"/>
           </a:p>
@@ -2233,7 +2233,7 @@
           <a:p>
             <a:fld id="{BA3E7282-3862-45AD-8CA0-6240484C2ACC}" type="datetimeFigureOut">
               <a:rPr lang="zh-TW" altLang="en-US" smtClean="0"/>
-              <a:t>2023/12/22</a:t>
+              <a:t>2026/8/1</a:t>
             </a:fld>
             <a:endParaRPr lang="zh-TW" altLang="en-US"/>
           </a:p>
@@ -2485,7 +2485,7 @@
           <a:p>
             <a:fld id="{BA3E7282-3862-45AD-8CA0-6240484C2ACC}" type="datetimeFigureOut">
               <a:rPr lang="zh-TW" altLang="en-US" smtClean="0"/>
-              <a:t>2023/12/22</a:t>
+              <a:t>2026/8/1</a:t>
             </a:fld>
             <a:endParaRPr lang="zh-TW" altLang="en-US"/>
           </a:p>
@@ -2696,7 +2696,7 @@
           <a:p>
             <a:fld id="{BA3E7282-3862-45AD-8CA0-6240484C2ACC}" type="datetimeFigureOut">
               <a:rPr lang="zh-TW" altLang="en-US" smtClean="0"/>
-              <a:t>2023/12/22</a:t>
+              <a:t>2026/8/1</a:t>
             </a:fld>
             <a:endParaRPr lang="zh-TW" altLang="en-US"/>
           </a:p>
@@ -3344,7 +3344,37 @@
                 <a:latin typeface="Microsoft JhengHei" pitchFamily="34" charset="-120"/>
                 <a:ea typeface="Microsoft JhengHei" pitchFamily="34" charset="-120"/>
               </a:rPr>
-              <a:t>本居於高處 卻降生這世上</a:t>
+              <a:t>本居於</a:t>
+            </a:r>
+            <a:r>
+              <a:rPr lang="zh-TW" altLang="en-US" sz="4800" b="1">
+                <a:solidFill>
+                  <a:srgbClr val="000066"/>
+                </a:solidFill>
+                <a:latin typeface="Microsoft JhengHei" pitchFamily="34" charset="-120"/>
+                <a:ea typeface="Microsoft JhengHei" pitchFamily="34" charset="-120"/>
+              </a:rPr>
+              <a:t>高</a:t>
+            </a:r>
+            <a:r>
+              <a:rPr lang="zh-TW" altLang="en-US" sz="4800" b="1" smtClean="0">
+                <a:solidFill>
+                  <a:srgbClr val="000066"/>
+                </a:solidFill>
+                <a:latin typeface="Microsoft JhengHei" pitchFamily="34" charset="-120"/>
+                <a:ea typeface="Microsoft JhengHei" pitchFamily="34" charset="-120"/>
+              </a:rPr>
+              <a:t>處  卻</a:t>
+            </a:r>
+            <a:r>
+              <a:rPr lang="zh-TW" altLang="en-US" sz="4800" b="1" dirty="0">
+                <a:solidFill>
+                  <a:srgbClr val="000066"/>
+                </a:solidFill>
+                <a:latin typeface="Microsoft JhengHei" pitchFamily="34" charset="-120"/>
+                <a:ea typeface="Microsoft JhengHei" pitchFamily="34" charset="-120"/>
+              </a:rPr>
+              <a:t>降生這世上</a:t>
             </a:r>
             <a:endParaRPr lang="en-US" altLang="zh-TW" sz="4800" b="1" dirty="0">
               <a:solidFill>
